--- a/notebook_ty/erd_template.pptx
+++ b/notebook_ty/erd_template.pptx
@@ -228,7 +228,7 @@
           <a:p>
             <a:fld id="{905DFC5F-1939-41AF-891D-8BE6928784CA}" type="datetimeFigureOut">
               <a:rPr lang="ko-KR" altLang="en-US" smtClean="0"/>
-              <a:t>2025. 11. 23.</a:t>
+              <a:t>2025. 11. 30.</a:t>
             </a:fld>
             <a:endParaRPr lang="ko-KR" altLang="en-US"/>
           </a:p>
@@ -393,7 +393,7 @@
           <a:p>
             <a:fld id="{A6BA3949-66A9-42B8-A303-0972F04D40C0}" type="datetimeFigureOut">
               <a:rPr lang="ko-KR" altLang="en-US" smtClean="0"/>
-              <a:t>2025. 11. 23.</a:t>
+              <a:t>2025. 11. 30.</a:t>
             </a:fld>
             <a:endParaRPr lang="ko-KR" altLang="en-US"/>
           </a:p>
@@ -1994,7 +1994,7 @@
             <a:fld id="{1805336C-5CC8-4FD5-A3DF-65457D0FFC6B}" type="datetimeFigureOut">
               <a:rPr lang="ko-KR" altLang="en-US" smtClean="0"/>
               <a:pPr/>
-              <a:t>2025. 11. 23.</a:t>
+              <a:t>2025. 11. 30.</a:t>
             </a:fld>
             <a:endParaRPr lang="ko-KR" altLang="en-US"/>
           </a:p>
@@ -2082,488 +2082,6 @@
               <a:t>‹#›</a:t>
             </a:fld>
             <a:endParaRPr lang="ko-KR" altLang="en-US"/>
-          </a:p>
-        </p:txBody>
-      </p:sp>
-      <p:grpSp>
-        <p:nvGrpSpPr>
-          <p:cNvPr id="7" name="그룹 6"/>
-          <p:cNvGrpSpPr/>
-          <p:nvPr userDrawn="1"/>
-        </p:nvGrpSpPr>
-        <p:grpSpPr>
-          <a:xfrm>
-            <a:off x="0" y="6551629"/>
-            <a:ext cx="12192000" cy="306371"/>
-            <a:chOff x="0" y="6551629"/>
-            <a:chExt cx="12192000" cy="306371"/>
-          </a:xfrm>
-        </p:grpSpPr>
-        <p:sp>
-          <p:nvSpPr>
-            <p:cNvPr id="8" name="직사각형 7"/>
-            <p:cNvSpPr/>
-            <p:nvPr userDrawn="1"/>
-          </p:nvSpPr>
-          <p:spPr>
-            <a:xfrm>
-              <a:off x="0" y="6551629"/>
-              <a:ext cx="11830639" cy="306371"/>
-            </a:xfrm>
-            <a:prstGeom prst="rect">
-              <a:avLst/>
-            </a:prstGeom>
-            <a:solidFill>
-              <a:schemeClr val="accent6">
-                <a:lumMod val="20000"/>
-                <a:lumOff val="80000"/>
-              </a:schemeClr>
-            </a:solidFill>
-            <a:ln>
-              <a:noFill/>
-            </a:ln>
-          </p:spPr>
-          <p:style>
-            <a:lnRef idx="2">
-              <a:schemeClr val="accent1">
-                <a:shade val="50000"/>
-              </a:schemeClr>
-            </a:lnRef>
-            <a:fillRef idx="1">
-              <a:schemeClr val="accent1"/>
-            </a:fillRef>
-            <a:effectRef idx="0">
-              <a:schemeClr val="accent1"/>
-            </a:effectRef>
-            <a:fontRef idx="minor">
-              <a:schemeClr val="lt1"/>
-            </a:fontRef>
-          </p:style>
-          <p:txBody>
-            <a:bodyPr rtlCol="0" anchor="ctr"/>
-            <a:lstStyle/>
-            <a:p>
-              <a:pPr algn="ctr"/>
-              <a:endParaRPr lang="ko-KR" altLang="en-US">
-                <a:latin typeface="KoPubWorld돋움체 Medium" panose="00000600000000000000" pitchFamily="2" charset="-127"/>
-                <a:ea typeface="KoPubWorld돋움체 Medium" panose="00000600000000000000" pitchFamily="2" charset="-127"/>
-                <a:cs typeface="KoPubWorld돋움체 Medium" panose="00000600000000000000" pitchFamily="2" charset="-127"/>
-              </a:endParaRPr>
-            </a:p>
-          </p:txBody>
-        </p:sp>
-        <p:sp>
-          <p:nvSpPr>
-            <p:cNvPr id="9" name="직사각형 8"/>
-            <p:cNvSpPr/>
-            <p:nvPr userDrawn="1"/>
-          </p:nvSpPr>
-          <p:spPr>
-            <a:xfrm>
-              <a:off x="11830639" y="6551629"/>
-              <a:ext cx="361361" cy="306371"/>
-            </a:xfrm>
-            <a:prstGeom prst="rect">
-              <a:avLst/>
-            </a:prstGeom>
-            <a:solidFill>
-              <a:schemeClr val="accent6">
-                <a:lumMod val="50000"/>
-              </a:schemeClr>
-            </a:solidFill>
-            <a:ln>
-              <a:noFill/>
-            </a:ln>
-          </p:spPr>
-          <p:style>
-            <a:lnRef idx="2">
-              <a:schemeClr val="accent1">
-                <a:shade val="50000"/>
-              </a:schemeClr>
-            </a:lnRef>
-            <a:fillRef idx="1">
-              <a:schemeClr val="accent1"/>
-            </a:fillRef>
-            <a:effectRef idx="0">
-              <a:schemeClr val="accent1"/>
-            </a:effectRef>
-            <a:fontRef idx="minor">
-              <a:schemeClr val="lt1"/>
-            </a:fontRef>
-          </p:style>
-          <p:txBody>
-            <a:bodyPr rtlCol="0" anchor="ctr"/>
-            <a:lstStyle/>
-            <a:p>
-              <a:pPr algn="ctr"/>
-              <a:endParaRPr lang="ko-KR" altLang="en-US">
-                <a:latin typeface="KoPubWorld돋움체 Medium" panose="00000600000000000000" pitchFamily="2" charset="-127"/>
-                <a:ea typeface="KoPubWorld돋움체 Medium" panose="00000600000000000000" pitchFamily="2" charset="-127"/>
-                <a:cs typeface="KoPubWorld돋움체 Medium" panose="00000600000000000000" pitchFamily="2" charset="-127"/>
-              </a:endParaRPr>
-            </a:p>
-          </p:txBody>
-        </p:sp>
-        <p:sp>
-          <p:nvSpPr>
-            <p:cNvPr id="10" name="순서도: 데이터 9"/>
-            <p:cNvSpPr/>
-            <p:nvPr userDrawn="1"/>
-          </p:nvSpPr>
-          <p:spPr>
-            <a:xfrm>
-              <a:off x="11644314" y="6551629"/>
-              <a:ext cx="455699" cy="306371"/>
-            </a:xfrm>
-            <a:prstGeom prst="flowChartInputOutput">
-              <a:avLst/>
-            </a:prstGeom>
-            <a:solidFill>
-              <a:schemeClr val="accent6">
-                <a:lumMod val="50000"/>
-              </a:schemeClr>
-            </a:solidFill>
-            <a:ln>
-              <a:noFill/>
-            </a:ln>
-          </p:spPr>
-          <p:style>
-            <a:lnRef idx="2">
-              <a:schemeClr val="accent1">
-                <a:shade val="50000"/>
-              </a:schemeClr>
-            </a:lnRef>
-            <a:fillRef idx="1">
-              <a:schemeClr val="accent1"/>
-            </a:fillRef>
-            <a:effectRef idx="0">
-              <a:schemeClr val="accent1"/>
-            </a:effectRef>
-            <a:fontRef idx="minor">
-              <a:schemeClr val="lt1"/>
-            </a:fontRef>
-          </p:style>
-          <p:txBody>
-            <a:bodyPr rtlCol="0" anchor="ctr"/>
-            <a:lstStyle/>
-            <a:p>
-              <a:pPr algn="ctr"/>
-              <a:endParaRPr lang="ko-KR" altLang="en-US">
-                <a:latin typeface="KoPubWorld돋움체 Medium" panose="00000600000000000000" pitchFamily="2" charset="-127"/>
-                <a:ea typeface="KoPubWorld돋움체 Medium" panose="00000600000000000000" pitchFamily="2" charset="-127"/>
-                <a:cs typeface="KoPubWorld돋움체 Medium" panose="00000600000000000000" pitchFamily="2" charset="-127"/>
-              </a:endParaRPr>
-            </a:p>
-          </p:txBody>
-        </p:sp>
-        <p:sp>
-          <p:nvSpPr>
-            <p:cNvPr id="11" name="순서도: 데이터 10"/>
-            <p:cNvSpPr/>
-            <p:nvPr userDrawn="1"/>
-          </p:nvSpPr>
-          <p:spPr>
-            <a:xfrm>
-              <a:off x="11347517" y="6551629"/>
-              <a:ext cx="489038" cy="306371"/>
-            </a:xfrm>
-            <a:prstGeom prst="flowChartInputOutput">
-              <a:avLst/>
-            </a:prstGeom>
-            <a:solidFill>
-              <a:schemeClr val="accent6">
-                <a:lumMod val="75000"/>
-              </a:schemeClr>
-            </a:solidFill>
-            <a:ln>
-              <a:noFill/>
-            </a:ln>
-          </p:spPr>
-          <p:style>
-            <a:lnRef idx="2">
-              <a:schemeClr val="accent1">
-                <a:shade val="50000"/>
-              </a:schemeClr>
-            </a:lnRef>
-            <a:fillRef idx="1">
-              <a:schemeClr val="accent1"/>
-            </a:fillRef>
-            <a:effectRef idx="0">
-              <a:schemeClr val="accent1"/>
-            </a:effectRef>
-            <a:fontRef idx="minor">
-              <a:schemeClr val="lt1"/>
-            </a:fontRef>
-          </p:style>
-          <p:txBody>
-            <a:bodyPr rtlCol="0" anchor="ctr"/>
-            <a:lstStyle/>
-            <a:p>
-              <a:pPr algn="ctr"/>
-              <a:endParaRPr lang="ko-KR" altLang="en-US">
-                <a:latin typeface="KoPubWorld돋움체 Medium" panose="00000600000000000000" pitchFamily="2" charset="-127"/>
-                <a:ea typeface="KoPubWorld돋움체 Medium" panose="00000600000000000000" pitchFamily="2" charset="-127"/>
-                <a:cs typeface="KoPubWorld돋움체 Medium" panose="00000600000000000000" pitchFamily="2" charset="-127"/>
-              </a:endParaRPr>
-            </a:p>
-          </p:txBody>
-        </p:sp>
-        <p:sp>
-          <p:nvSpPr>
-            <p:cNvPr id="12" name="순서도: 데이터 11"/>
-            <p:cNvSpPr/>
-            <p:nvPr userDrawn="1"/>
-          </p:nvSpPr>
-          <p:spPr>
-            <a:xfrm>
-              <a:off x="10981452" y="6551629"/>
-              <a:ext cx="486080" cy="306371"/>
-            </a:xfrm>
-            <a:prstGeom prst="flowChartInputOutput">
-              <a:avLst/>
-            </a:prstGeom>
-            <a:solidFill>
-              <a:schemeClr val="accent6"/>
-            </a:solidFill>
-            <a:ln>
-              <a:noFill/>
-            </a:ln>
-          </p:spPr>
-          <p:style>
-            <a:lnRef idx="2">
-              <a:schemeClr val="accent1">
-                <a:shade val="50000"/>
-              </a:schemeClr>
-            </a:lnRef>
-            <a:fillRef idx="1">
-              <a:schemeClr val="accent1"/>
-            </a:fillRef>
-            <a:effectRef idx="0">
-              <a:schemeClr val="accent1"/>
-            </a:effectRef>
-            <a:fontRef idx="minor">
-              <a:schemeClr val="lt1"/>
-            </a:fontRef>
-          </p:style>
-          <p:txBody>
-            <a:bodyPr rtlCol="0" anchor="ctr"/>
-            <a:lstStyle/>
-            <a:p>
-              <a:pPr algn="ctr"/>
-              <a:endParaRPr lang="ko-KR" altLang="en-US">
-                <a:latin typeface="KoPubWorld돋움체 Medium" panose="00000600000000000000" pitchFamily="2" charset="-127"/>
-                <a:ea typeface="KoPubWorld돋움체 Medium" panose="00000600000000000000" pitchFamily="2" charset="-127"/>
-                <a:cs typeface="KoPubWorld돋움체 Medium" panose="00000600000000000000" pitchFamily="2" charset="-127"/>
-              </a:endParaRPr>
-            </a:p>
-          </p:txBody>
-        </p:sp>
-        <p:sp>
-          <p:nvSpPr>
-            <p:cNvPr id="13" name="순서도: 데이터 12"/>
-            <p:cNvSpPr/>
-            <p:nvPr userDrawn="1"/>
-          </p:nvSpPr>
-          <p:spPr>
-            <a:xfrm>
-              <a:off x="10595021" y="6551629"/>
-              <a:ext cx="489038" cy="306371"/>
-            </a:xfrm>
-            <a:prstGeom prst="flowChartInputOutput">
-              <a:avLst/>
-            </a:prstGeom>
-            <a:solidFill>
-              <a:schemeClr val="accent6">
-                <a:lumMod val="60000"/>
-                <a:lumOff val="40000"/>
-              </a:schemeClr>
-            </a:solidFill>
-            <a:ln>
-              <a:noFill/>
-            </a:ln>
-          </p:spPr>
-          <p:style>
-            <a:lnRef idx="2">
-              <a:schemeClr val="accent1">
-                <a:shade val="50000"/>
-              </a:schemeClr>
-            </a:lnRef>
-            <a:fillRef idx="1">
-              <a:schemeClr val="accent1"/>
-            </a:fillRef>
-            <a:effectRef idx="0">
-              <a:schemeClr val="accent1"/>
-            </a:effectRef>
-            <a:fontRef idx="minor">
-              <a:schemeClr val="lt1"/>
-            </a:fontRef>
-          </p:style>
-          <p:txBody>
-            <a:bodyPr rtlCol="0" anchor="ctr"/>
-            <a:lstStyle/>
-            <a:p>
-              <a:pPr algn="ctr"/>
-              <a:endParaRPr lang="ko-KR" altLang="en-US">
-                <a:latin typeface="KoPubWorld돋움체 Medium" panose="00000600000000000000" pitchFamily="2" charset="-127"/>
-                <a:ea typeface="KoPubWorld돋움체 Medium" panose="00000600000000000000" pitchFamily="2" charset="-127"/>
-                <a:cs typeface="KoPubWorld돋움체 Medium" panose="00000600000000000000" pitchFamily="2" charset="-127"/>
-              </a:endParaRPr>
-            </a:p>
-          </p:txBody>
-        </p:sp>
-        <p:sp>
-          <p:nvSpPr>
-            <p:cNvPr id="14" name="순서도: 데이터 13"/>
-            <p:cNvSpPr/>
-            <p:nvPr userDrawn="1"/>
-          </p:nvSpPr>
-          <p:spPr>
-            <a:xfrm>
-              <a:off x="10193817" y="6551629"/>
-              <a:ext cx="494954" cy="306371"/>
-            </a:xfrm>
-            <a:prstGeom prst="flowChartInputOutput">
-              <a:avLst/>
-            </a:prstGeom>
-            <a:solidFill>
-              <a:schemeClr val="accent6">
-                <a:lumMod val="40000"/>
-                <a:lumOff val="60000"/>
-              </a:schemeClr>
-            </a:solidFill>
-            <a:ln>
-              <a:noFill/>
-            </a:ln>
-          </p:spPr>
-          <p:style>
-            <a:lnRef idx="2">
-              <a:schemeClr val="accent1">
-                <a:shade val="50000"/>
-              </a:schemeClr>
-            </a:lnRef>
-            <a:fillRef idx="1">
-              <a:schemeClr val="accent1"/>
-            </a:fillRef>
-            <a:effectRef idx="0">
-              <a:schemeClr val="accent1"/>
-            </a:effectRef>
-            <a:fontRef idx="minor">
-              <a:schemeClr val="lt1"/>
-            </a:fontRef>
-          </p:style>
-          <p:txBody>
-            <a:bodyPr rtlCol="0" anchor="ctr"/>
-            <a:lstStyle/>
-            <a:p>
-              <a:pPr algn="ctr"/>
-              <a:endParaRPr lang="ko-KR" altLang="en-US">
-                <a:latin typeface="KoPubWorld돋움체 Medium" panose="00000600000000000000" pitchFamily="2" charset="-127"/>
-                <a:ea typeface="KoPubWorld돋움체 Medium" panose="00000600000000000000" pitchFamily="2" charset="-127"/>
-                <a:cs typeface="KoPubWorld돋움체 Medium" panose="00000600000000000000" pitchFamily="2" charset="-127"/>
-              </a:endParaRPr>
-            </a:p>
-          </p:txBody>
-        </p:sp>
-      </p:grpSp>
-      <p:sp>
-        <p:nvSpPr>
-          <p:cNvPr id="18" name="TextBox 17"/>
-          <p:cNvSpPr txBox="1"/>
-          <p:nvPr userDrawn="1"/>
-        </p:nvSpPr>
-        <p:spPr>
-          <a:xfrm>
-            <a:off x="31389" y="6584248"/>
-            <a:ext cx="10156511" cy="276999"/>
-          </a:xfrm>
-          <a:prstGeom prst="rect">
-            <a:avLst/>
-          </a:prstGeom>
-          <a:noFill/>
-        </p:spPr>
-        <p:txBody>
-          <a:bodyPr wrap="square" rtlCol="0">
-            <a:spAutoFit/>
-          </a:bodyPr>
-          <a:lstStyle/>
-          <a:p>
-            <a:r>
-              <a:rPr lang="en-US" altLang="ko-KR" sz="1200" baseline="0" dirty="0">
-                <a:latin typeface="KoPubWorld돋움체 Light" panose="00000300000000000000" pitchFamily="2" charset="-127"/>
-                <a:ea typeface="KoPubWorld돋움체 Light" panose="00000300000000000000" pitchFamily="2" charset="-127"/>
-                <a:cs typeface="KoPubWorld돋움체 Light" panose="00000300000000000000" pitchFamily="2" charset="-127"/>
-              </a:rPr>
-              <a:t>Database Design, </a:t>
-            </a:r>
-            <a:r>
-              <a:rPr lang="en-US" altLang="ko-KR" sz="1200" dirty="0">
-                <a:latin typeface="KoPubWorld돋움체 Light" panose="00000300000000000000" pitchFamily="2" charset="-127"/>
-                <a:ea typeface="KoPubWorld돋움체 Light" panose="00000300000000000000" pitchFamily="2" charset="-127"/>
-                <a:cs typeface="KoPubWorld돋움체 Light" panose="00000300000000000000" pitchFamily="2" charset="-127"/>
-              </a:rPr>
-              <a:t>School of </a:t>
-            </a:r>
-            <a:r>
-              <a:rPr lang="en-US" altLang="ko-KR" sz="1200" dirty="0" err="1">
-                <a:latin typeface="KoPubWorld돋움체 Light" panose="00000300000000000000" pitchFamily="2" charset="-127"/>
-                <a:ea typeface="KoPubWorld돋움체 Light" panose="00000300000000000000" pitchFamily="2" charset="-127"/>
-                <a:cs typeface="KoPubWorld돋움체 Light" panose="00000300000000000000" pitchFamily="2" charset="-127"/>
-              </a:rPr>
-              <a:t>Comput</a:t>
-            </a:r>
-            <a:r>
-              <a:rPr lang="en-US" altLang="ko-KR" sz="1200" dirty="0">
-                <a:latin typeface="KoPubWorld돋움체 Light" panose="00000300000000000000" pitchFamily="2" charset="-127"/>
-                <a:ea typeface="KoPubWorld돋움체 Light" panose="00000300000000000000" pitchFamily="2" charset="-127"/>
-                <a:cs typeface="KoPubWorld돋움체 Light" panose="00000300000000000000" pitchFamily="2" charset="-127"/>
-              </a:rPr>
-              <a:t>. Sci. and Eng.</a:t>
-            </a:r>
-            <a:r>
-              <a:rPr lang="en-US" altLang="ko-KR" sz="1200" baseline="0" dirty="0">
-                <a:latin typeface="KoPubWorld돋움체 Light" panose="00000300000000000000" pitchFamily="2" charset="-127"/>
-                <a:ea typeface="KoPubWorld돋움체 Light" panose="00000300000000000000" pitchFamily="2" charset="-127"/>
-                <a:cs typeface="KoPubWorld돋움체 Light" panose="00000300000000000000" pitchFamily="2" charset="-127"/>
-              </a:rPr>
-              <a:t>, Chung-</a:t>
-            </a:r>
-            <a:r>
-              <a:rPr lang="en-US" altLang="ko-KR" sz="1200" baseline="0" dirty="0" err="1">
-                <a:latin typeface="KoPubWorld돋움체 Light" panose="00000300000000000000" pitchFamily="2" charset="-127"/>
-                <a:ea typeface="KoPubWorld돋움체 Light" panose="00000300000000000000" pitchFamily="2" charset="-127"/>
-                <a:cs typeface="KoPubWorld돋움체 Light" panose="00000300000000000000" pitchFamily="2" charset="-127"/>
-              </a:rPr>
-              <a:t>Ang</a:t>
-            </a:r>
-            <a:r>
-              <a:rPr lang="en-US" altLang="ko-KR" sz="1200" baseline="0" dirty="0">
-                <a:latin typeface="KoPubWorld돋움체 Light" panose="00000300000000000000" pitchFamily="2" charset="-127"/>
-                <a:ea typeface="KoPubWorld돋움체 Light" panose="00000300000000000000" pitchFamily="2" charset="-127"/>
-                <a:cs typeface="KoPubWorld돋움체 Light" panose="00000300000000000000" pitchFamily="2" charset="-127"/>
-              </a:rPr>
-              <a:t> Univ. </a:t>
-            </a:r>
-            <a:r>
-              <a:rPr lang="en-US" altLang="ko-KR" sz="1200" dirty="0">
-                <a:latin typeface="KoPubWorld돋움체 Light" panose="00000300000000000000" pitchFamily="2" charset="-127"/>
-                <a:ea typeface="KoPubWorld돋움체 Light" panose="00000300000000000000" pitchFamily="2" charset="-127"/>
-                <a:cs typeface="KoPubWorld돋움체 Light" panose="00000300000000000000" pitchFamily="2" charset="-127"/>
-              </a:rPr>
-              <a:t>Fall Semester</a:t>
-            </a:r>
-            <a:r>
-              <a:rPr lang="en-US" altLang="ko-KR" sz="1200" baseline="0" dirty="0">
-                <a:latin typeface="KoPubWorld돋움체 Light" panose="00000300000000000000" pitchFamily="2" charset="-127"/>
-                <a:ea typeface="KoPubWorld돋움체 Light" panose="00000300000000000000" pitchFamily="2" charset="-127"/>
-                <a:cs typeface="KoPubWorld돋움체 Light" panose="00000300000000000000" pitchFamily="2" charset="-127"/>
-              </a:rPr>
-              <a:t>, 2024.</a:t>
-            </a:r>
-            <a:endParaRPr lang="ko-KR" altLang="en-US" sz="1200" dirty="0">
-              <a:latin typeface="KoPubWorld돋움체 Light" panose="00000300000000000000" pitchFamily="2" charset="-127"/>
-              <a:ea typeface="KoPubWorld돋움체 Light" panose="00000300000000000000" pitchFamily="2" charset="-127"/>
-              <a:cs typeface="KoPubWorld돋움체 Light" panose="00000300000000000000" pitchFamily="2" charset="-127"/>
-            </a:endParaRPr>
           </a:p>
         </p:txBody>
       </p:sp>
@@ -21438,10 +20956,7 @@
             <a:avLst/>
           </a:prstGeom>
           <a:solidFill>
-            <a:schemeClr val="tx2">
-              <a:lumMod val="20000"/>
-              <a:lumOff val="80000"/>
-            </a:schemeClr>
+            <a:srgbClr val="FFE98E"/>
           </a:solidFill>
         </p:spPr>
         <p:style>
@@ -25974,10 +25489,7 @@
             <a:avLst/>
           </a:prstGeom>
           <a:solidFill>
-            <a:schemeClr val="tx2">
-              <a:lumMod val="20000"/>
-              <a:lumOff val="80000"/>
-            </a:schemeClr>
+            <a:srgbClr val="FFE98E"/>
           </a:solidFill>
         </p:spPr>
         <p:style>
@@ -26038,10 +25550,7 @@
             <a:avLst/>
           </a:prstGeom>
           <a:solidFill>
-            <a:schemeClr val="tx2">
-              <a:lumMod val="20000"/>
-              <a:lumOff val="80000"/>
-            </a:schemeClr>
+            <a:srgbClr val="FFE98E"/>
           </a:solidFill>
         </p:spPr>
         <p:style>
@@ -26108,10 +25617,7 @@
             <a:avLst/>
           </a:prstGeom>
           <a:solidFill>
-            <a:schemeClr val="tx2">
-              <a:lumMod val="20000"/>
-              <a:lumOff val="80000"/>
-            </a:schemeClr>
+            <a:srgbClr val="FFE98E"/>
           </a:solidFill>
         </p:spPr>
         <p:style>
@@ -26956,628 +26462,6 @@
       </p:sp>
       <p:grpSp>
         <p:nvGrpSpPr>
-          <p:cNvPr id="2" name="그룹 1">
-            <a:extLst>
-              <a:ext uri="{FF2B5EF4-FFF2-40B4-BE49-F238E27FC236}">
-                <a16:creationId xmlns:a16="http://schemas.microsoft.com/office/drawing/2014/main" id="{F299BAFF-C2D8-0C6B-1FC5-E87314FD5F4E}"/>
-              </a:ext>
-            </a:extLst>
-          </p:cNvPr>
-          <p:cNvGrpSpPr>
-            <a:grpSpLocks noChangeAspect="1"/>
-          </p:cNvGrpSpPr>
-          <p:nvPr/>
-        </p:nvGrpSpPr>
-        <p:grpSpPr>
-          <a:xfrm>
-            <a:off x="1793590" y="770327"/>
-            <a:ext cx="148067" cy="108000"/>
-            <a:chOff x="7409659" y="2902132"/>
-            <a:chExt cx="317047" cy="239471"/>
-          </a:xfrm>
-        </p:grpSpPr>
-        <p:grpSp>
-          <p:nvGrpSpPr>
-            <p:cNvPr id="3" name="그룹 2">
-              <a:extLst>
-                <a:ext uri="{FF2B5EF4-FFF2-40B4-BE49-F238E27FC236}">
-                  <a16:creationId xmlns:a16="http://schemas.microsoft.com/office/drawing/2014/main" id="{684CCF07-B98E-3991-1636-54D114BCF741}"/>
-                </a:ext>
-              </a:extLst>
-            </p:cNvPr>
-            <p:cNvGrpSpPr/>
-            <p:nvPr/>
-          </p:nvGrpSpPr>
-          <p:grpSpPr>
-            <a:xfrm>
-              <a:off x="7604467" y="2904802"/>
-              <a:ext cx="122239" cy="236801"/>
-              <a:chOff x="2297548" y="3782508"/>
-              <a:chExt cx="122239" cy="236801"/>
-            </a:xfrm>
-          </p:grpSpPr>
-          <p:cxnSp>
-            <p:nvCxnSpPr>
-              <p:cNvPr id="6" name="직선 연결선 322">
-                <a:extLst>
-                  <a:ext uri="{FF2B5EF4-FFF2-40B4-BE49-F238E27FC236}">
-                    <a16:creationId xmlns:a16="http://schemas.microsoft.com/office/drawing/2014/main" id="{03E1D58D-FDBB-3935-6940-026C5A4F5193}"/>
-                  </a:ext>
-                </a:extLst>
-              </p:cNvPr>
-              <p:cNvCxnSpPr/>
-              <p:nvPr/>
-            </p:nvCxnSpPr>
-            <p:spPr>
-              <a:xfrm flipV="1">
-                <a:off x="2297548" y="3782508"/>
-                <a:ext cx="122237" cy="122237"/>
-              </a:xfrm>
-              <a:prstGeom prst="line">
-                <a:avLst/>
-              </a:prstGeom>
-              <a:ln w="6350"/>
-            </p:spPr>
-            <p:style>
-              <a:lnRef idx="2">
-                <a:schemeClr val="dk1"/>
-              </a:lnRef>
-              <a:fillRef idx="0">
-                <a:schemeClr val="dk1"/>
-              </a:fillRef>
-              <a:effectRef idx="1">
-                <a:schemeClr val="dk1"/>
-              </a:effectRef>
-              <a:fontRef idx="minor">
-                <a:schemeClr val="tx1"/>
-              </a:fontRef>
-            </p:style>
-          </p:cxnSp>
-          <p:cxnSp>
-            <p:nvCxnSpPr>
-              <p:cNvPr id="7" name="직선 연결선 323">
-                <a:extLst>
-                  <a:ext uri="{FF2B5EF4-FFF2-40B4-BE49-F238E27FC236}">
-                    <a16:creationId xmlns:a16="http://schemas.microsoft.com/office/drawing/2014/main" id="{727156F0-6968-B59E-A3B5-5EE906CA49E7}"/>
-                  </a:ext>
-                </a:extLst>
-              </p:cNvPr>
-              <p:cNvCxnSpPr/>
-              <p:nvPr/>
-            </p:nvCxnSpPr>
-            <p:spPr>
-              <a:xfrm>
-                <a:off x="2297548" y="3897072"/>
-                <a:ext cx="122237" cy="122237"/>
-              </a:xfrm>
-              <a:prstGeom prst="line">
-                <a:avLst/>
-              </a:prstGeom>
-              <a:ln w="6350"/>
-            </p:spPr>
-            <p:style>
-              <a:lnRef idx="2">
-                <a:schemeClr val="dk1"/>
-              </a:lnRef>
-              <a:fillRef idx="0">
-                <a:schemeClr val="dk1"/>
-              </a:fillRef>
-              <a:effectRef idx="1">
-                <a:schemeClr val="dk1"/>
-              </a:effectRef>
-              <a:fontRef idx="minor">
-                <a:schemeClr val="tx1"/>
-              </a:fontRef>
-            </p:style>
-          </p:cxnSp>
-          <p:cxnSp>
-            <p:nvCxnSpPr>
-              <p:cNvPr id="8" name="직선 연결선 324">
-                <a:extLst>
-                  <a:ext uri="{FF2B5EF4-FFF2-40B4-BE49-F238E27FC236}">
-                    <a16:creationId xmlns:a16="http://schemas.microsoft.com/office/drawing/2014/main" id="{C0763F29-253A-6EAC-B8DC-DC658BE87116}"/>
-                  </a:ext>
-                </a:extLst>
-              </p:cNvPr>
-              <p:cNvCxnSpPr/>
-              <p:nvPr/>
-            </p:nvCxnSpPr>
-            <p:spPr>
-              <a:xfrm>
-                <a:off x="2297548" y="3900404"/>
-                <a:ext cx="122239" cy="0"/>
-              </a:xfrm>
-              <a:prstGeom prst="line">
-                <a:avLst/>
-              </a:prstGeom>
-              <a:ln w="6350"/>
-            </p:spPr>
-            <p:style>
-              <a:lnRef idx="2">
-                <a:schemeClr val="dk1"/>
-              </a:lnRef>
-              <a:fillRef idx="0">
-                <a:schemeClr val="dk1"/>
-              </a:fillRef>
-              <a:effectRef idx="1">
-                <a:schemeClr val="dk1"/>
-              </a:effectRef>
-              <a:fontRef idx="minor">
-                <a:schemeClr val="tx1"/>
-              </a:fontRef>
-            </p:style>
-          </p:cxnSp>
-        </p:grpSp>
-        <p:cxnSp>
-          <p:nvCxnSpPr>
-            <p:cNvPr id="4" name="직선 연결선 326">
-              <a:extLst>
-                <a:ext uri="{FF2B5EF4-FFF2-40B4-BE49-F238E27FC236}">
-                  <a16:creationId xmlns:a16="http://schemas.microsoft.com/office/drawing/2014/main" id="{C2F83187-9F98-4C95-C528-A9F3AC8D7EEF}"/>
-                </a:ext>
-              </a:extLst>
-            </p:cNvPr>
-            <p:cNvCxnSpPr/>
-            <p:nvPr/>
-          </p:nvCxnSpPr>
-          <p:spPr>
-            <a:xfrm>
-              <a:off x="7604467" y="2902132"/>
-              <a:ext cx="0" cy="236801"/>
-            </a:xfrm>
-            <a:prstGeom prst="line">
-              <a:avLst/>
-            </a:prstGeom>
-            <a:ln w="6350"/>
-          </p:spPr>
-          <p:style>
-            <a:lnRef idx="2">
-              <a:schemeClr val="dk1"/>
-            </a:lnRef>
-            <a:fillRef idx="0">
-              <a:schemeClr val="dk1"/>
-            </a:fillRef>
-            <a:effectRef idx="1">
-              <a:schemeClr val="dk1"/>
-            </a:effectRef>
-            <a:fontRef idx="minor">
-              <a:schemeClr val="tx1"/>
-            </a:fontRef>
-          </p:style>
-        </p:cxnSp>
-        <p:sp>
-          <p:nvSpPr>
-            <p:cNvPr id="5" name="타원 4">
-              <a:extLst>
-                <a:ext uri="{FF2B5EF4-FFF2-40B4-BE49-F238E27FC236}">
-                  <a16:creationId xmlns:a16="http://schemas.microsoft.com/office/drawing/2014/main" id="{22355CC5-981D-3923-9FFF-1C3D4F69BACD}"/>
-                </a:ext>
-              </a:extLst>
-            </p:cNvPr>
-            <p:cNvSpPr/>
-            <p:nvPr/>
-          </p:nvSpPr>
-          <p:spPr>
-            <a:xfrm>
-              <a:off x="7409659" y="2925800"/>
-              <a:ext cx="194806" cy="194806"/>
-            </a:xfrm>
-            <a:prstGeom prst="ellipse">
-              <a:avLst/>
-            </a:prstGeom>
-            <a:noFill/>
-            <a:ln w="6350"/>
-          </p:spPr>
-          <p:style>
-            <a:lnRef idx="2">
-              <a:schemeClr val="dk1"/>
-            </a:lnRef>
-            <a:fillRef idx="1">
-              <a:schemeClr val="lt1"/>
-            </a:fillRef>
-            <a:effectRef idx="0">
-              <a:schemeClr val="dk1"/>
-            </a:effectRef>
-            <a:fontRef idx="minor">
-              <a:schemeClr val="dk1"/>
-            </a:fontRef>
-          </p:style>
-          <p:txBody>
-            <a:bodyPr rtlCol="0" anchor="ctr"/>
-            <a:lstStyle/>
-            <a:p>
-              <a:pPr algn="ctr"/>
-              <a:endParaRPr lang="ko-KR" altLang="en-US">
-                <a:latin typeface="KoPubWorld돋움체 Light" panose="00000300000000000000" pitchFamily="2" charset="-127"/>
-                <a:ea typeface="KoPubWorld돋움체 Light" panose="00000300000000000000" pitchFamily="2" charset="-127"/>
-                <a:cs typeface="KoPubWorld돋움체 Light" panose="00000300000000000000" pitchFamily="2" charset="-127"/>
-              </a:endParaRPr>
-            </a:p>
-          </p:txBody>
-        </p:sp>
-      </p:grpSp>
-      <p:grpSp>
-        <p:nvGrpSpPr>
-          <p:cNvPr id="9" name="그룹 8">
-            <a:extLst>
-              <a:ext uri="{FF2B5EF4-FFF2-40B4-BE49-F238E27FC236}">
-                <a16:creationId xmlns:a16="http://schemas.microsoft.com/office/drawing/2014/main" id="{1A37847D-0611-A0F5-B303-4404B42B1146}"/>
-              </a:ext>
-            </a:extLst>
-          </p:cNvPr>
-          <p:cNvGrpSpPr>
-            <a:grpSpLocks noChangeAspect="1"/>
-          </p:cNvGrpSpPr>
-          <p:nvPr/>
-        </p:nvGrpSpPr>
-        <p:grpSpPr>
-          <a:xfrm>
-            <a:off x="1575620" y="502715"/>
-            <a:ext cx="57088" cy="108000"/>
-            <a:chOff x="7604467" y="2108611"/>
-            <a:chExt cx="122239" cy="239471"/>
-          </a:xfrm>
-        </p:grpSpPr>
-        <p:grpSp>
-          <p:nvGrpSpPr>
-            <p:cNvPr id="10" name="그룹 9">
-              <a:extLst>
-                <a:ext uri="{FF2B5EF4-FFF2-40B4-BE49-F238E27FC236}">
-                  <a16:creationId xmlns:a16="http://schemas.microsoft.com/office/drawing/2014/main" id="{D35F0D56-A9B3-B212-AF04-8E08CE0134D3}"/>
-                </a:ext>
-              </a:extLst>
-            </p:cNvPr>
-            <p:cNvGrpSpPr/>
-            <p:nvPr/>
-          </p:nvGrpSpPr>
-          <p:grpSpPr>
-            <a:xfrm>
-              <a:off x="7604467" y="2111281"/>
-              <a:ext cx="122239" cy="236801"/>
-              <a:chOff x="2297548" y="3782508"/>
-              <a:chExt cx="122239" cy="236801"/>
-            </a:xfrm>
-          </p:grpSpPr>
-          <p:cxnSp>
-            <p:nvCxnSpPr>
-              <p:cNvPr id="12" name="직선 연결선 359">
-                <a:extLst>
-                  <a:ext uri="{FF2B5EF4-FFF2-40B4-BE49-F238E27FC236}">
-                    <a16:creationId xmlns:a16="http://schemas.microsoft.com/office/drawing/2014/main" id="{A3C3E404-72F6-1B56-E3BA-076DEBEFC253}"/>
-                  </a:ext>
-                </a:extLst>
-              </p:cNvPr>
-              <p:cNvCxnSpPr/>
-              <p:nvPr/>
-            </p:nvCxnSpPr>
-            <p:spPr>
-              <a:xfrm flipV="1">
-                <a:off x="2297548" y="3782508"/>
-                <a:ext cx="122237" cy="122237"/>
-              </a:xfrm>
-              <a:prstGeom prst="line">
-                <a:avLst/>
-              </a:prstGeom>
-              <a:ln w="6350"/>
-            </p:spPr>
-            <p:style>
-              <a:lnRef idx="2">
-                <a:schemeClr val="dk1"/>
-              </a:lnRef>
-              <a:fillRef idx="0">
-                <a:schemeClr val="dk1"/>
-              </a:fillRef>
-              <a:effectRef idx="1">
-                <a:schemeClr val="dk1"/>
-              </a:effectRef>
-              <a:fontRef idx="minor">
-                <a:schemeClr val="tx1"/>
-              </a:fontRef>
-            </p:style>
-          </p:cxnSp>
-          <p:cxnSp>
-            <p:nvCxnSpPr>
-              <p:cNvPr id="13" name="직선 연결선 360">
-                <a:extLst>
-                  <a:ext uri="{FF2B5EF4-FFF2-40B4-BE49-F238E27FC236}">
-                    <a16:creationId xmlns:a16="http://schemas.microsoft.com/office/drawing/2014/main" id="{C343D62F-3912-7328-4813-7B869E468081}"/>
-                  </a:ext>
-                </a:extLst>
-              </p:cNvPr>
-              <p:cNvCxnSpPr/>
-              <p:nvPr/>
-            </p:nvCxnSpPr>
-            <p:spPr>
-              <a:xfrm>
-                <a:off x="2297548" y="3897072"/>
-                <a:ext cx="122237" cy="122237"/>
-              </a:xfrm>
-              <a:prstGeom prst="line">
-                <a:avLst/>
-              </a:prstGeom>
-              <a:ln w="6350"/>
-            </p:spPr>
-            <p:style>
-              <a:lnRef idx="2">
-                <a:schemeClr val="dk1"/>
-              </a:lnRef>
-              <a:fillRef idx="0">
-                <a:schemeClr val="dk1"/>
-              </a:fillRef>
-              <a:effectRef idx="1">
-                <a:schemeClr val="dk1"/>
-              </a:effectRef>
-              <a:fontRef idx="minor">
-                <a:schemeClr val="tx1"/>
-              </a:fontRef>
-            </p:style>
-          </p:cxnSp>
-          <p:cxnSp>
-            <p:nvCxnSpPr>
-              <p:cNvPr id="14" name="직선 연결선 361">
-                <a:extLst>
-                  <a:ext uri="{FF2B5EF4-FFF2-40B4-BE49-F238E27FC236}">
-                    <a16:creationId xmlns:a16="http://schemas.microsoft.com/office/drawing/2014/main" id="{D1DB6B90-4E32-83DE-9514-42D7597B0523}"/>
-                  </a:ext>
-                </a:extLst>
-              </p:cNvPr>
-              <p:cNvCxnSpPr/>
-              <p:nvPr/>
-            </p:nvCxnSpPr>
-            <p:spPr>
-              <a:xfrm>
-                <a:off x="2297548" y="3900404"/>
-                <a:ext cx="122239" cy="0"/>
-              </a:xfrm>
-              <a:prstGeom prst="line">
-                <a:avLst/>
-              </a:prstGeom>
-              <a:ln w="6350"/>
-            </p:spPr>
-            <p:style>
-              <a:lnRef idx="2">
-                <a:schemeClr val="dk1"/>
-              </a:lnRef>
-              <a:fillRef idx="0">
-                <a:schemeClr val="dk1"/>
-              </a:fillRef>
-              <a:effectRef idx="1">
-                <a:schemeClr val="dk1"/>
-              </a:effectRef>
-              <a:fontRef idx="minor">
-                <a:schemeClr val="tx1"/>
-              </a:fontRef>
-            </p:style>
-          </p:cxnSp>
-        </p:grpSp>
-        <p:cxnSp>
-          <p:nvCxnSpPr>
-            <p:cNvPr id="11" name="직선 연결선 363">
-              <a:extLst>
-                <a:ext uri="{FF2B5EF4-FFF2-40B4-BE49-F238E27FC236}">
-                  <a16:creationId xmlns:a16="http://schemas.microsoft.com/office/drawing/2014/main" id="{82212FB9-599E-3FD1-F92D-BA32E0293569}"/>
-                </a:ext>
-              </a:extLst>
-            </p:cNvPr>
-            <p:cNvCxnSpPr/>
-            <p:nvPr/>
-          </p:nvCxnSpPr>
-          <p:spPr>
-            <a:xfrm>
-              <a:off x="7604467" y="2108611"/>
-              <a:ext cx="0" cy="236801"/>
-            </a:xfrm>
-            <a:prstGeom prst="line">
-              <a:avLst/>
-            </a:prstGeom>
-            <a:ln w="6350"/>
-          </p:spPr>
-          <p:style>
-            <a:lnRef idx="2">
-              <a:schemeClr val="dk1"/>
-            </a:lnRef>
-            <a:fillRef idx="0">
-              <a:schemeClr val="dk1"/>
-            </a:fillRef>
-            <a:effectRef idx="1">
-              <a:schemeClr val="dk1"/>
-            </a:effectRef>
-            <a:fontRef idx="minor">
-              <a:schemeClr val="tx1"/>
-            </a:fontRef>
-          </p:style>
-        </p:cxnSp>
-      </p:grpSp>
-      <p:grpSp>
-        <p:nvGrpSpPr>
-          <p:cNvPr id="15" name="그룹 14">
-            <a:extLst>
-              <a:ext uri="{FF2B5EF4-FFF2-40B4-BE49-F238E27FC236}">
-                <a16:creationId xmlns:a16="http://schemas.microsoft.com/office/drawing/2014/main" id="{E5257313-A371-8714-9F4D-A07EC762CCD5}"/>
-              </a:ext>
-            </a:extLst>
-          </p:cNvPr>
-          <p:cNvGrpSpPr>
-            <a:grpSpLocks noChangeAspect="1"/>
-          </p:cNvGrpSpPr>
-          <p:nvPr/>
-        </p:nvGrpSpPr>
-        <p:grpSpPr>
-          <a:xfrm>
-            <a:off x="1854189" y="530218"/>
-            <a:ext cx="92005" cy="108000"/>
-            <a:chOff x="9162258" y="2902132"/>
-            <a:chExt cx="194808" cy="236801"/>
-          </a:xfrm>
-        </p:grpSpPr>
-        <p:cxnSp>
-          <p:nvCxnSpPr>
-            <p:cNvPr id="16" name="직선 연결선 314">
-              <a:extLst>
-                <a:ext uri="{FF2B5EF4-FFF2-40B4-BE49-F238E27FC236}">
-                  <a16:creationId xmlns:a16="http://schemas.microsoft.com/office/drawing/2014/main" id="{CA7F0233-8A37-8281-5DCB-9D6FDB295863}"/>
-                </a:ext>
-              </a:extLst>
-            </p:cNvPr>
-            <p:cNvCxnSpPr/>
-            <p:nvPr/>
-          </p:nvCxnSpPr>
-          <p:spPr>
-            <a:xfrm>
-              <a:off x="9357066" y="2902132"/>
-              <a:ext cx="0" cy="236801"/>
-            </a:xfrm>
-            <a:prstGeom prst="line">
-              <a:avLst/>
-            </a:prstGeom>
-            <a:ln w="6350"/>
-          </p:spPr>
-          <p:style>
-            <a:lnRef idx="2">
-              <a:schemeClr val="dk1"/>
-            </a:lnRef>
-            <a:fillRef idx="0">
-              <a:schemeClr val="dk1"/>
-            </a:fillRef>
-            <a:effectRef idx="1">
-              <a:schemeClr val="dk1"/>
-            </a:effectRef>
-            <a:fontRef idx="minor">
-              <a:schemeClr val="tx1"/>
-            </a:fontRef>
-          </p:style>
-        </p:cxnSp>
-        <p:sp>
-          <p:nvSpPr>
-            <p:cNvPr id="17" name="타원 16">
-              <a:extLst>
-                <a:ext uri="{FF2B5EF4-FFF2-40B4-BE49-F238E27FC236}">
-                  <a16:creationId xmlns:a16="http://schemas.microsoft.com/office/drawing/2014/main" id="{71DC42C4-1290-DA61-9E57-E33294EE4DC3}"/>
-                </a:ext>
-              </a:extLst>
-            </p:cNvPr>
-            <p:cNvSpPr/>
-            <p:nvPr/>
-          </p:nvSpPr>
-          <p:spPr>
-            <a:xfrm>
-              <a:off x="9162258" y="2925800"/>
-              <a:ext cx="194806" cy="194806"/>
-            </a:xfrm>
-            <a:prstGeom prst="ellipse">
-              <a:avLst/>
-            </a:prstGeom>
-            <a:noFill/>
-            <a:ln w="6350"/>
-          </p:spPr>
-          <p:style>
-            <a:lnRef idx="2">
-              <a:schemeClr val="dk1"/>
-            </a:lnRef>
-            <a:fillRef idx="1">
-              <a:schemeClr val="lt1"/>
-            </a:fillRef>
-            <a:effectRef idx="0">
-              <a:schemeClr val="dk1"/>
-            </a:effectRef>
-            <a:fontRef idx="minor">
-              <a:schemeClr val="dk1"/>
-            </a:fontRef>
-          </p:style>
-          <p:txBody>
-            <a:bodyPr rtlCol="0" anchor="ctr"/>
-            <a:lstStyle/>
-            <a:p>
-              <a:pPr algn="ctr"/>
-              <a:endParaRPr lang="ko-KR" altLang="en-US">
-                <a:latin typeface="KoPubWorld돋움체 Light" panose="00000300000000000000" pitchFamily="2" charset="-127"/>
-                <a:ea typeface="KoPubWorld돋움체 Light" panose="00000300000000000000" pitchFamily="2" charset="-127"/>
-                <a:cs typeface="KoPubWorld돋움체 Light" panose="00000300000000000000" pitchFamily="2" charset="-127"/>
-              </a:endParaRPr>
-            </a:p>
-          </p:txBody>
-        </p:sp>
-      </p:grpSp>
-      <p:cxnSp>
-        <p:nvCxnSpPr>
-          <p:cNvPr id="18" name="직선 연결선 351">
-            <a:extLst>
-              <a:ext uri="{FF2B5EF4-FFF2-40B4-BE49-F238E27FC236}">
-                <a16:creationId xmlns:a16="http://schemas.microsoft.com/office/drawing/2014/main" id="{03D84663-60ED-5B16-6B84-C3B82857BCEA}"/>
-              </a:ext>
-            </a:extLst>
-          </p:cNvPr>
-          <p:cNvCxnSpPr>
-            <a:cxnSpLocks/>
-          </p:cNvCxnSpPr>
-          <p:nvPr/>
-        </p:nvCxnSpPr>
-        <p:spPr>
-          <a:xfrm>
-            <a:off x="1507624" y="944865"/>
-            <a:ext cx="108000" cy="0"/>
-          </a:xfrm>
-          <a:prstGeom prst="line">
-            <a:avLst/>
-          </a:prstGeom>
-          <a:ln w="6350"/>
-        </p:spPr>
-        <p:style>
-          <a:lnRef idx="2">
-            <a:schemeClr val="dk1"/>
-          </a:lnRef>
-          <a:fillRef idx="0">
-            <a:schemeClr val="dk1"/>
-          </a:fillRef>
-          <a:effectRef idx="1">
-            <a:schemeClr val="dk1"/>
-          </a:effectRef>
-          <a:fontRef idx="minor">
-            <a:schemeClr val="tx1"/>
-          </a:fontRef>
-        </p:style>
-      </p:cxnSp>
-      <p:cxnSp>
-        <p:nvCxnSpPr>
-          <p:cNvPr id="19" name="직선 연결선 351">
-            <a:extLst>
-              <a:ext uri="{FF2B5EF4-FFF2-40B4-BE49-F238E27FC236}">
-                <a16:creationId xmlns:a16="http://schemas.microsoft.com/office/drawing/2014/main" id="{3F1128B6-623C-330C-B8F9-2306C14994B5}"/>
-              </a:ext>
-            </a:extLst>
-          </p:cNvPr>
-          <p:cNvCxnSpPr>
-            <a:cxnSpLocks/>
-          </p:cNvCxnSpPr>
-          <p:nvPr/>
-        </p:nvCxnSpPr>
-        <p:spPr>
-          <a:xfrm>
-            <a:off x="2113429" y="662327"/>
-            <a:ext cx="0" cy="108000"/>
-          </a:xfrm>
-          <a:prstGeom prst="line">
-            <a:avLst/>
-          </a:prstGeom>
-          <a:ln w="6350"/>
-        </p:spPr>
-        <p:style>
-          <a:lnRef idx="2">
-            <a:schemeClr val="dk1"/>
-          </a:lnRef>
-          <a:fillRef idx="0">
-            <a:schemeClr val="dk1"/>
-          </a:fillRef>
-          <a:effectRef idx="1">
-            <a:schemeClr val="dk1"/>
-          </a:effectRef>
-          <a:fontRef idx="minor">
-            <a:schemeClr val="tx1"/>
-          </a:fontRef>
-        </p:style>
-      </p:cxnSp>
-      <p:grpSp>
-        <p:nvGrpSpPr>
           <p:cNvPr id="20" name="그룹 19">
             <a:extLst>
               <a:ext uri="{FF2B5EF4-FFF2-40B4-BE49-F238E27FC236}">
@@ -29383,628 +28267,6 @@
           </p:style>
         </p:cxnSp>
       </p:grpSp>
-      <p:grpSp>
-        <p:nvGrpSpPr>
-          <p:cNvPr id="937" name="그룹 936">
-            <a:extLst>
-              <a:ext uri="{FF2B5EF4-FFF2-40B4-BE49-F238E27FC236}">
-                <a16:creationId xmlns:a16="http://schemas.microsoft.com/office/drawing/2014/main" id="{50685590-5C8F-73DE-548B-F69B97B3CCCD}"/>
-              </a:ext>
-            </a:extLst>
-          </p:cNvPr>
-          <p:cNvGrpSpPr>
-            <a:grpSpLocks noChangeAspect="1"/>
-          </p:cNvGrpSpPr>
-          <p:nvPr/>
-        </p:nvGrpSpPr>
-        <p:grpSpPr>
-          <a:xfrm>
-            <a:off x="9921875" y="629813"/>
-            <a:ext cx="148067" cy="108000"/>
-            <a:chOff x="7409659" y="2902132"/>
-            <a:chExt cx="317047" cy="239471"/>
-          </a:xfrm>
-        </p:grpSpPr>
-        <p:grpSp>
-          <p:nvGrpSpPr>
-            <p:cNvPr id="948" name="그룹 947">
-              <a:extLst>
-                <a:ext uri="{FF2B5EF4-FFF2-40B4-BE49-F238E27FC236}">
-                  <a16:creationId xmlns:a16="http://schemas.microsoft.com/office/drawing/2014/main" id="{FFE3395F-4F18-8AC7-EE7F-6F988733C55B}"/>
-                </a:ext>
-              </a:extLst>
-            </p:cNvPr>
-            <p:cNvGrpSpPr/>
-            <p:nvPr/>
-          </p:nvGrpSpPr>
-          <p:grpSpPr>
-            <a:xfrm>
-              <a:off x="7604467" y="2904802"/>
-              <a:ext cx="122239" cy="236801"/>
-              <a:chOff x="2297548" y="3782508"/>
-              <a:chExt cx="122239" cy="236801"/>
-            </a:xfrm>
-          </p:grpSpPr>
-          <p:cxnSp>
-            <p:nvCxnSpPr>
-              <p:cNvPr id="952" name="직선 연결선 322">
-                <a:extLst>
-                  <a:ext uri="{FF2B5EF4-FFF2-40B4-BE49-F238E27FC236}">
-                    <a16:creationId xmlns:a16="http://schemas.microsoft.com/office/drawing/2014/main" id="{275750BF-0913-2A1C-B80D-583F5251686B}"/>
-                  </a:ext>
-                </a:extLst>
-              </p:cNvPr>
-              <p:cNvCxnSpPr/>
-              <p:nvPr/>
-            </p:nvCxnSpPr>
-            <p:spPr>
-              <a:xfrm flipV="1">
-                <a:off x="2297548" y="3782508"/>
-                <a:ext cx="122237" cy="122237"/>
-              </a:xfrm>
-              <a:prstGeom prst="line">
-                <a:avLst/>
-              </a:prstGeom>
-              <a:ln w="6350"/>
-            </p:spPr>
-            <p:style>
-              <a:lnRef idx="2">
-                <a:schemeClr val="dk1"/>
-              </a:lnRef>
-              <a:fillRef idx="0">
-                <a:schemeClr val="dk1"/>
-              </a:fillRef>
-              <a:effectRef idx="1">
-                <a:schemeClr val="dk1"/>
-              </a:effectRef>
-              <a:fontRef idx="minor">
-                <a:schemeClr val="tx1"/>
-              </a:fontRef>
-            </p:style>
-          </p:cxnSp>
-          <p:cxnSp>
-            <p:nvCxnSpPr>
-              <p:cNvPr id="953" name="직선 연결선 323">
-                <a:extLst>
-                  <a:ext uri="{FF2B5EF4-FFF2-40B4-BE49-F238E27FC236}">
-                    <a16:creationId xmlns:a16="http://schemas.microsoft.com/office/drawing/2014/main" id="{C4522881-819D-D50C-1796-1466D89D2DD8}"/>
-                  </a:ext>
-                </a:extLst>
-              </p:cNvPr>
-              <p:cNvCxnSpPr/>
-              <p:nvPr/>
-            </p:nvCxnSpPr>
-            <p:spPr>
-              <a:xfrm>
-                <a:off x="2297548" y="3897072"/>
-                <a:ext cx="122237" cy="122237"/>
-              </a:xfrm>
-              <a:prstGeom prst="line">
-                <a:avLst/>
-              </a:prstGeom>
-              <a:ln w="6350"/>
-            </p:spPr>
-            <p:style>
-              <a:lnRef idx="2">
-                <a:schemeClr val="dk1"/>
-              </a:lnRef>
-              <a:fillRef idx="0">
-                <a:schemeClr val="dk1"/>
-              </a:fillRef>
-              <a:effectRef idx="1">
-                <a:schemeClr val="dk1"/>
-              </a:effectRef>
-              <a:fontRef idx="minor">
-                <a:schemeClr val="tx1"/>
-              </a:fontRef>
-            </p:style>
-          </p:cxnSp>
-          <p:cxnSp>
-            <p:nvCxnSpPr>
-              <p:cNvPr id="955" name="직선 연결선 324">
-                <a:extLst>
-                  <a:ext uri="{FF2B5EF4-FFF2-40B4-BE49-F238E27FC236}">
-                    <a16:creationId xmlns:a16="http://schemas.microsoft.com/office/drawing/2014/main" id="{3D4DFC0B-4721-5808-27CF-0BE07DD467B2}"/>
-                  </a:ext>
-                </a:extLst>
-              </p:cNvPr>
-              <p:cNvCxnSpPr/>
-              <p:nvPr/>
-            </p:nvCxnSpPr>
-            <p:spPr>
-              <a:xfrm>
-                <a:off x="2297548" y="3900404"/>
-                <a:ext cx="122239" cy="0"/>
-              </a:xfrm>
-              <a:prstGeom prst="line">
-                <a:avLst/>
-              </a:prstGeom>
-              <a:ln w="6350"/>
-            </p:spPr>
-            <p:style>
-              <a:lnRef idx="2">
-                <a:schemeClr val="dk1"/>
-              </a:lnRef>
-              <a:fillRef idx="0">
-                <a:schemeClr val="dk1"/>
-              </a:fillRef>
-              <a:effectRef idx="1">
-                <a:schemeClr val="dk1"/>
-              </a:effectRef>
-              <a:fontRef idx="minor">
-                <a:schemeClr val="tx1"/>
-              </a:fontRef>
-            </p:style>
-          </p:cxnSp>
-        </p:grpSp>
-        <p:cxnSp>
-          <p:nvCxnSpPr>
-            <p:cNvPr id="949" name="직선 연결선 326">
-              <a:extLst>
-                <a:ext uri="{FF2B5EF4-FFF2-40B4-BE49-F238E27FC236}">
-                  <a16:creationId xmlns:a16="http://schemas.microsoft.com/office/drawing/2014/main" id="{03132314-4EAE-E79D-0E74-6EDE3F61970E}"/>
-                </a:ext>
-              </a:extLst>
-            </p:cNvPr>
-            <p:cNvCxnSpPr/>
-            <p:nvPr/>
-          </p:nvCxnSpPr>
-          <p:spPr>
-            <a:xfrm>
-              <a:off x="7604467" y="2902132"/>
-              <a:ext cx="0" cy="236801"/>
-            </a:xfrm>
-            <a:prstGeom prst="line">
-              <a:avLst/>
-            </a:prstGeom>
-            <a:ln w="6350"/>
-          </p:spPr>
-          <p:style>
-            <a:lnRef idx="2">
-              <a:schemeClr val="dk1"/>
-            </a:lnRef>
-            <a:fillRef idx="0">
-              <a:schemeClr val="dk1"/>
-            </a:fillRef>
-            <a:effectRef idx="1">
-              <a:schemeClr val="dk1"/>
-            </a:effectRef>
-            <a:fontRef idx="minor">
-              <a:schemeClr val="tx1"/>
-            </a:fontRef>
-          </p:style>
-        </p:cxnSp>
-        <p:sp>
-          <p:nvSpPr>
-            <p:cNvPr id="950" name="타원 949">
-              <a:extLst>
-                <a:ext uri="{FF2B5EF4-FFF2-40B4-BE49-F238E27FC236}">
-                  <a16:creationId xmlns:a16="http://schemas.microsoft.com/office/drawing/2014/main" id="{AD186DA6-CB5D-A491-19D3-9E5EB8A37A75}"/>
-                </a:ext>
-              </a:extLst>
-            </p:cNvPr>
-            <p:cNvSpPr/>
-            <p:nvPr/>
-          </p:nvSpPr>
-          <p:spPr>
-            <a:xfrm>
-              <a:off x="7409659" y="2925800"/>
-              <a:ext cx="194806" cy="194806"/>
-            </a:xfrm>
-            <a:prstGeom prst="ellipse">
-              <a:avLst/>
-            </a:prstGeom>
-            <a:noFill/>
-            <a:ln w="6350"/>
-          </p:spPr>
-          <p:style>
-            <a:lnRef idx="2">
-              <a:schemeClr val="dk1"/>
-            </a:lnRef>
-            <a:fillRef idx="1">
-              <a:schemeClr val="lt1"/>
-            </a:fillRef>
-            <a:effectRef idx="0">
-              <a:schemeClr val="dk1"/>
-            </a:effectRef>
-            <a:fontRef idx="minor">
-              <a:schemeClr val="dk1"/>
-            </a:fontRef>
-          </p:style>
-          <p:txBody>
-            <a:bodyPr rtlCol="0" anchor="ctr"/>
-            <a:lstStyle/>
-            <a:p>
-              <a:pPr algn="ctr"/>
-              <a:endParaRPr lang="ko-KR" altLang="en-US">
-                <a:latin typeface="KoPubWorld돋움체 Light" panose="00000300000000000000" pitchFamily="2" charset="-127"/>
-                <a:ea typeface="KoPubWorld돋움체 Light" panose="00000300000000000000" pitchFamily="2" charset="-127"/>
-                <a:cs typeface="KoPubWorld돋움체 Light" panose="00000300000000000000" pitchFamily="2" charset="-127"/>
-              </a:endParaRPr>
-            </a:p>
-          </p:txBody>
-        </p:sp>
-      </p:grpSp>
-      <p:grpSp>
-        <p:nvGrpSpPr>
-          <p:cNvPr id="956" name="그룹 955">
-            <a:extLst>
-              <a:ext uri="{FF2B5EF4-FFF2-40B4-BE49-F238E27FC236}">
-                <a16:creationId xmlns:a16="http://schemas.microsoft.com/office/drawing/2014/main" id="{9E95FF47-224B-1F4C-6FA8-583B922533CF}"/>
-              </a:ext>
-            </a:extLst>
-          </p:cNvPr>
-          <p:cNvGrpSpPr>
-            <a:grpSpLocks noChangeAspect="1"/>
-          </p:cNvGrpSpPr>
-          <p:nvPr/>
-        </p:nvGrpSpPr>
-        <p:grpSpPr>
-          <a:xfrm>
-            <a:off x="9972174" y="428461"/>
-            <a:ext cx="57088" cy="108000"/>
-            <a:chOff x="7604467" y="2108611"/>
-            <a:chExt cx="122239" cy="239471"/>
-          </a:xfrm>
-        </p:grpSpPr>
-        <p:grpSp>
-          <p:nvGrpSpPr>
-            <p:cNvPr id="958" name="그룹 957">
-              <a:extLst>
-                <a:ext uri="{FF2B5EF4-FFF2-40B4-BE49-F238E27FC236}">
-                  <a16:creationId xmlns:a16="http://schemas.microsoft.com/office/drawing/2014/main" id="{E8DDB839-890E-4387-FA39-B88AF54F61EC}"/>
-                </a:ext>
-              </a:extLst>
-            </p:cNvPr>
-            <p:cNvGrpSpPr/>
-            <p:nvPr/>
-          </p:nvGrpSpPr>
-          <p:grpSpPr>
-            <a:xfrm>
-              <a:off x="7604467" y="2111281"/>
-              <a:ext cx="122239" cy="236801"/>
-              <a:chOff x="2297548" y="3782508"/>
-              <a:chExt cx="122239" cy="236801"/>
-            </a:xfrm>
-          </p:grpSpPr>
-          <p:cxnSp>
-            <p:nvCxnSpPr>
-              <p:cNvPr id="961" name="직선 연결선 359">
-                <a:extLst>
-                  <a:ext uri="{FF2B5EF4-FFF2-40B4-BE49-F238E27FC236}">
-                    <a16:creationId xmlns:a16="http://schemas.microsoft.com/office/drawing/2014/main" id="{A768B7A5-7941-6171-A793-A930142F397E}"/>
-                  </a:ext>
-                </a:extLst>
-              </p:cNvPr>
-              <p:cNvCxnSpPr/>
-              <p:nvPr/>
-            </p:nvCxnSpPr>
-            <p:spPr>
-              <a:xfrm flipV="1">
-                <a:off x="2297548" y="3782508"/>
-                <a:ext cx="122237" cy="122237"/>
-              </a:xfrm>
-              <a:prstGeom prst="line">
-                <a:avLst/>
-              </a:prstGeom>
-              <a:ln w="6350"/>
-            </p:spPr>
-            <p:style>
-              <a:lnRef idx="2">
-                <a:schemeClr val="dk1"/>
-              </a:lnRef>
-              <a:fillRef idx="0">
-                <a:schemeClr val="dk1"/>
-              </a:fillRef>
-              <a:effectRef idx="1">
-                <a:schemeClr val="dk1"/>
-              </a:effectRef>
-              <a:fontRef idx="minor">
-                <a:schemeClr val="tx1"/>
-              </a:fontRef>
-            </p:style>
-          </p:cxnSp>
-          <p:cxnSp>
-            <p:nvCxnSpPr>
-              <p:cNvPr id="963" name="직선 연결선 360">
-                <a:extLst>
-                  <a:ext uri="{FF2B5EF4-FFF2-40B4-BE49-F238E27FC236}">
-                    <a16:creationId xmlns:a16="http://schemas.microsoft.com/office/drawing/2014/main" id="{57E5D0CA-4B3D-7FA2-EB71-00C0ED39066A}"/>
-                  </a:ext>
-                </a:extLst>
-              </p:cNvPr>
-              <p:cNvCxnSpPr/>
-              <p:nvPr/>
-            </p:nvCxnSpPr>
-            <p:spPr>
-              <a:xfrm>
-                <a:off x="2297548" y="3897072"/>
-                <a:ext cx="122237" cy="122237"/>
-              </a:xfrm>
-              <a:prstGeom prst="line">
-                <a:avLst/>
-              </a:prstGeom>
-              <a:ln w="6350"/>
-            </p:spPr>
-            <p:style>
-              <a:lnRef idx="2">
-                <a:schemeClr val="dk1"/>
-              </a:lnRef>
-              <a:fillRef idx="0">
-                <a:schemeClr val="dk1"/>
-              </a:fillRef>
-              <a:effectRef idx="1">
-                <a:schemeClr val="dk1"/>
-              </a:effectRef>
-              <a:fontRef idx="minor">
-                <a:schemeClr val="tx1"/>
-              </a:fontRef>
-            </p:style>
-          </p:cxnSp>
-          <p:cxnSp>
-            <p:nvCxnSpPr>
-              <p:cNvPr id="964" name="직선 연결선 361">
-                <a:extLst>
-                  <a:ext uri="{FF2B5EF4-FFF2-40B4-BE49-F238E27FC236}">
-                    <a16:creationId xmlns:a16="http://schemas.microsoft.com/office/drawing/2014/main" id="{E91824E1-0FBB-52CE-DEDB-B478D2B46D36}"/>
-                  </a:ext>
-                </a:extLst>
-              </p:cNvPr>
-              <p:cNvCxnSpPr/>
-              <p:nvPr/>
-            </p:nvCxnSpPr>
-            <p:spPr>
-              <a:xfrm>
-                <a:off x="2297548" y="3900404"/>
-                <a:ext cx="122239" cy="0"/>
-              </a:xfrm>
-              <a:prstGeom prst="line">
-                <a:avLst/>
-              </a:prstGeom>
-              <a:ln w="6350"/>
-            </p:spPr>
-            <p:style>
-              <a:lnRef idx="2">
-                <a:schemeClr val="dk1"/>
-              </a:lnRef>
-              <a:fillRef idx="0">
-                <a:schemeClr val="dk1"/>
-              </a:fillRef>
-              <a:effectRef idx="1">
-                <a:schemeClr val="dk1"/>
-              </a:effectRef>
-              <a:fontRef idx="minor">
-                <a:schemeClr val="tx1"/>
-              </a:fontRef>
-            </p:style>
-          </p:cxnSp>
-        </p:grpSp>
-        <p:cxnSp>
-          <p:nvCxnSpPr>
-            <p:cNvPr id="959" name="직선 연결선 363">
-              <a:extLst>
-                <a:ext uri="{FF2B5EF4-FFF2-40B4-BE49-F238E27FC236}">
-                  <a16:creationId xmlns:a16="http://schemas.microsoft.com/office/drawing/2014/main" id="{82396D5D-A478-0D37-FA0E-DFDF3A7AB0DF}"/>
-                </a:ext>
-              </a:extLst>
-            </p:cNvPr>
-            <p:cNvCxnSpPr/>
-            <p:nvPr/>
-          </p:nvCxnSpPr>
-          <p:spPr>
-            <a:xfrm>
-              <a:off x="7604467" y="2108611"/>
-              <a:ext cx="0" cy="236801"/>
-            </a:xfrm>
-            <a:prstGeom prst="line">
-              <a:avLst/>
-            </a:prstGeom>
-            <a:ln w="6350"/>
-          </p:spPr>
-          <p:style>
-            <a:lnRef idx="2">
-              <a:schemeClr val="dk1"/>
-            </a:lnRef>
-            <a:fillRef idx="0">
-              <a:schemeClr val="dk1"/>
-            </a:fillRef>
-            <a:effectRef idx="1">
-              <a:schemeClr val="dk1"/>
-            </a:effectRef>
-            <a:fontRef idx="minor">
-              <a:schemeClr val="tx1"/>
-            </a:fontRef>
-          </p:style>
-        </p:cxnSp>
-      </p:grpSp>
-      <p:grpSp>
-        <p:nvGrpSpPr>
-          <p:cNvPr id="966" name="그룹 965">
-            <a:extLst>
-              <a:ext uri="{FF2B5EF4-FFF2-40B4-BE49-F238E27FC236}">
-                <a16:creationId xmlns:a16="http://schemas.microsoft.com/office/drawing/2014/main" id="{F7CA94F8-3BDF-72A2-AC2D-F69B84A561CD}"/>
-              </a:ext>
-            </a:extLst>
-          </p:cNvPr>
-          <p:cNvGrpSpPr>
-            <a:grpSpLocks noChangeAspect="1"/>
-          </p:cNvGrpSpPr>
-          <p:nvPr/>
-        </p:nvGrpSpPr>
-        <p:grpSpPr>
-          <a:xfrm>
-            <a:off x="10124029" y="428461"/>
-            <a:ext cx="92005" cy="108000"/>
-            <a:chOff x="9162258" y="2902132"/>
-            <a:chExt cx="194808" cy="236801"/>
-          </a:xfrm>
-        </p:grpSpPr>
-        <p:cxnSp>
-          <p:nvCxnSpPr>
-            <p:cNvPr id="967" name="직선 연결선 314">
-              <a:extLst>
-                <a:ext uri="{FF2B5EF4-FFF2-40B4-BE49-F238E27FC236}">
-                  <a16:creationId xmlns:a16="http://schemas.microsoft.com/office/drawing/2014/main" id="{01BE07F0-BC5D-2592-F2AC-C1C22ECC8075}"/>
-                </a:ext>
-              </a:extLst>
-            </p:cNvPr>
-            <p:cNvCxnSpPr/>
-            <p:nvPr/>
-          </p:nvCxnSpPr>
-          <p:spPr>
-            <a:xfrm>
-              <a:off x="9357066" y="2902132"/>
-              <a:ext cx="0" cy="236801"/>
-            </a:xfrm>
-            <a:prstGeom prst="line">
-              <a:avLst/>
-            </a:prstGeom>
-            <a:ln w="6350"/>
-          </p:spPr>
-          <p:style>
-            <a:lnRef idx="2">
-              <a:schemeClr val="dk1"/>
-            </a:lnRef>
-            <a:fillRef idx="0">
-              <a:schemeClr val="dk1"/>
-            </a:fillRef>
-            <a:effectRef idx="1">
-              <a:schemeClr val="dk1"/>
-            </a:effectRef>
-            <a:fontRef idx="minor">
-              <a:schemeClr val="tx1"/>
-            </a:fontRef>
-          </p:style>
-        </p:cxnSp>
-        <p:sp>
-          <p:nvSpPr>
-            <p:cNvPr id="969" name="타원 968">
-              <a:extLst>
-                <a:ext uri="{FF2B5EF4-FFF2-40B4-BE49-F238E27FC236}">
-                  <a16:creationId xmlns:a16="http://schemas.microsoft.com/office/drawing/2014/main" id="{E9D7FC6C-1C7F-7E50-183A-89452B17BF82}"/>
-                </a:ext>
-              </a:extLst>
-            </p:cNvPr>
-            <p:cNvSpPr/>
-            <p:nvPr/>
-          </p:nvSpPr>
-          <p:spPr>
-            <a:xfrm>
-              <a:off x="9162258" y="2925800"/>
-              <a:ext cx="194806" cy="194806"/>
-            </a:xfrm>
-            <a:prstGeom prst="ellipse">
-              <a:avLst/>
-            </a:prstGeom>
-            <a:noFill/>
-            <a:ln w="6350"/>
-          </p:spPr>
-          <p:style>
-            <a:lnRef idx="2">
-              <a:schemeClr val="dk1"/>
-            </a:lnRef>
-            <a:fillRef idx="1">
-              <a:schemeClr val="lt1"/>
-            </a:fillRef>
-            <a:effectRef idx="0">
-              <a:schemeClr val="dk1"/>
-            </a:effectRef>
-            <a:fontRef idx="minor">
-              <a:schemeClr val="dk1"/>
-            </a:fontRef>
-          </p:style>
-          <p:txBody>
-            <a:bodyPr rtlCol="0" anchor="ctr"/>
-            <a:lstStyle/>
-            <a:p>
-              <a:pPr algn="ctr"/>
-              <a:endParaRPr lang="ko-KR" altLang="en-US">
-                <a:latin typeface="KoPubWorld돋움체 Light" panose="00000300000000000000" pitchFamily="2" charset="-127"/>
-                <a:ea typeface="KoPubWorld돋움체 Light" panose="00000300000000000000" pitchFamily="2" charset="-127"/>
-                <a:cs typeface="KoPubWorld돋움체 Light" panose="00000300000000000000" pitchFamily="2" charset="-127"/>
-              </a:endParaRPr>
-            </a:p>
-          </p:txBody>
-        </p:sp>
-      </p:grpSp>
-      <p:cxnSp>
-        <p:nvCxnSpPr>
-          <p:cNvPr id="970" name="직선 연결선 351">
-            <a:extLst>
-              <a:ext uri="{FF2B5EF4-FFF2-40B4-BE49-F238E27FC236}">
-                <a16:creationId xmlns:a16="http://schemas.microsoft.com/office/drawing/2014/main" id="{F5F16B18-A5E2-585C-6447-9C049A81B2D0}"/>
-              </a:ext>
-            </a:extLst>
-          </p:cNvPr>
-          <p:cNvCxnSpPr>
-            <a:cxnSpLocks/>
-          </p:cNvCxnSpPr>
-          <p:nvPr/>
-        </p:nvCxnSpPr>
-        <p:spPr>
-          <a:xfrm>
-            <a:off x="10168422" y="770327"/>
-            <a:ext cx="108000" cy="0"/>
-          </a:xfrm>
-          <a:prstGeom prst="line">
-            <a:avLst/>
-          </a:prstGeom>
-          <a:ln w="6350"/>
-        </p:spPr>
-        <p:style>
-          <a:lnRef idx="2">
-            <a:schemeClr val="dk1"/>
-          </a:lnRef>
-          <a:fillRef idx="0">
-            <a:schemeClr val="dk1"/>
-          </a:fillRef>
-          <a:effectRef idx="1">
-            <a:schemeClr val="dk1"/>
-          </a:effectRef>
-          <a:fontRef idx="minor">
-            <a:schemeClr val="tx1"/>
-          </a:fontRef>
-        </p:style>
-      </p:cxnSp>
-      <p:cxnSp>
-        <p:nvCxnSpPr>
-          <p:cNvPr id="971" name="직선 연결선 351">
-            <a:extLst>
-              <a:ext uri="{FF2B5EF4-FFF2-40B4-BE49-F238E27FC236}">
-                <a16:creationId xmlns:a16="http://schemas.microsoft.com/office/drawing/2014/main" id="{CF342EC3-FA20-554E-90AB-1C13D79E31B0}"/>
-              </a:ext>
-            </a:extLst>
-          </p:cNvPr>
-          <p:cNvCxnSpPr>
-            <a:cxnSpLocks/>
-          </p:cNvCxnSpPr>
-          <p:nvPr/>
-        </p:nvCxnSpPr>
-        <p:spPr>
-          <a:xfrm>
-            <a:off x="10393207" y="428461"/>
-            <a:ext cx="0" cy="108000"/>
-          </a:xfrm>
-          <a:prstGeom prst="line">
-            <a:avLst/>
-          </a:prstGeom>
-          <a:ln w="6350"/>
-        </p:spPr>
-        <p:style>
-          <a:lnRef idx="2">
-            <a:schemeClr val="dk1"/>
-          </a:lnRef>
-          <a:fillRef idx="0">
-            <a:schemeClr val="dk1"/>
-          </a:fillRef>
-          <a:effectRef idx="1">
-            <a:schemeClr val="dk1"/>
-          </a:effectRef>
-          <a:fontRef idx="minor">
-            <a:schemeClr val="tx1"/>
-          </a:fontRef>
-        </p:style>
-      </p:cxnSp>
       <p:cxnSp>
         <p:nvCxnSpPr>
           <p:cNvPr id="974" name="직선 연결선 351">
